--- a/docs/resources/slides/1sw-wk3-day5.pptx
+++ b/docs/resources/slides/1sw-wk3-day5.pptx
@@ -1547,7 +1547,7 @@
                 <a:ea typeface="Arial Black" pitchFamily="34" charset="-122"/>
                 <a:cs typeface="Arial Black" pitchFamily="34" charset="-120"/>
               </a:rPr>
-              <a:t>How do you learn best?</a:t>
+              <a:t>Learning styles</a:t>
             </a:r>
             <a:endParaRPr lang="en-US" sz="6000" dirty="0"/>
           </a:p>
@@ -1586,7 +1586,7 @@
                 <a:ea typeface="Arial" pitchFamily="34" charset="-122"/>
                 <a:cs typeface="Arial" pitchFamily="34" charset="-120"/>
               </a:rPr>
-              <a:t>Xello: Learning Style quiz, then the lesson.</a:t>
+              <a:t>Xello quiz, then the lesson.</a:t>
             </a:r>
             <a:endParaRPr lang="en-US" sz="3000" dirty="0"/>
           </a:p>
